--- a/Resources-Notes-Ppts/ASP-NET-Identity/ASPNET.pptx
+++ b/Resources-Notes-Ppts/ASP-NET-Identity/ASPNET.pptx
@@ -5,7 +5,7 @@
     <p:sldMasterId id="2147483671" r:id="rId1"/>
   </p:sldMasterIdLst>
   <p:notesMasterIdLst>
-    <p:notesMasterId r:id="rId29"/>
+    <p:notesMasterId r:id="rId31"/>
   </p:notesMasterIdLst>
   <p:sldIdLst>
     <p:sldId id="256" r:id="rId2"/>
@@ -35,20 +35,22 @@
     <p:sldId id="281" r:id="rId26"/>
     <p:sldId id="283" r:id="rId27"/>
     <p:sldId id="284" r:id="rId28"/>
+    <p:sldId id="285" r:id="rId29"/>
+    <p:sldId id="286" r:id="rId30"/>
   </p:sldIdLst>
   <p:sldSz cx="9144000" cy="5143500" type="screen16x9"/>
   <p:notesSz cx="6858000" cy="9144000"/>
   <p:embeddedFontLst>
     <p:embeddedFont>
       <p:font typeface="Hammersmith One" panose="02010703030501060504" pitchFamily="2" charset="0"/>
-      <p:regular r:id="rId30"/>
+      <p:regular r:id="rId32"/>
     </p:embeddedFont>
     <p:embeddedFont>
       <p:font typeface="Source Sans Pro" panose="020B0503030403020204" pitchFamily="34" charset="0"/>
-      <p:regular r:id="rId31"/>
-      <p:bold r:id="rId32"/>
-      <p:italic r:id="rId33"/>
-      <p:boldItalic r:id="rId34"/>
+      <p:regular r:id="rId33"/>
+      <p:bold r:id="rId34"/>
+      <p:italic r:id="rId35"/>
+      <p:boldItalic r:id="rId36"/>
     </p:embeddedFont>
   </p:embeddedFontLst>
   <p:defaultTextStyle>
@@ -34969,6 +34971,603 @@
 </p:sld>
 </file>
 
+<file path=ppt/slides/slide28.xml><?xml version="1.0" encoding="utf-8"?>
+<p:sld xmlns:a="http://schemas.openxmlformats.org/drawingml/2006/main" xmlns:r="http://schemas.openxmlformats.org/officeDocument/2006/relationships" xmlns:p="http://schemas.openxmlformats.org/presentationml/2006/main">
+  <p:cSld>
+    <p:spTree>
+      <p:nvGrpSpPr>
+        <p:cNvPr id="1" name=""/>
+        <p:cNvGrpSpPr/>
+        <p:nvPr/>
+      </p:nvGrpSpPr>
+      <p:grpSpPr>
+        <a:xfrm>
+          <a:off x="0" y="0"/>
+          <a:ext cx="0" cy="0"/>
+          <a:chOff x="0" y="0"/>
+          <a:chExt cx="0" cy="0"/>
+        </a:xfrm>
+      </p:grpSpPr>
+      <p:sp>
+        <p:nvSpPr>
+          <p:cNvPr id="3" name="Title 2">
+            <a:extLst>
+              <a:ext uri="{FF2B5EF4-FFF2-40B4-BE49-F238E27FC236}">
+                <a16:creationId xmlns:a16="http://schemas.microsoft.com/office/drawing/2014/main" id="{0AE0A82E-2DD1-0FFB-B8FB-C039A89AB911}"/>
+              </a:ext>
+            </a:extLst>
+          </p:cNvPr>
+          <p:cNvSpPr>
+            <a:spLocks noGrp="1"/>
+          </p:cNvSpPr>
+          <p:nvPr>
+            <p:ph type="title"/>
+          </p:nvPr>
+        </p:nvSpPr>
+        <p:spPr/>
+        <p:txBody>
+          <a:bodyPr/>
+          <a:lstStyle/>
+          <a:p>
+            <a:r>
+              <a:rPr lang="en-US" dirty="0"/>
+              <a:t>Eager vs Lazy Loading</a:t>
+            </a:r>
+          </a:p>
+        </p:txBody>
+      </p:sp>
+      <p:pic>
+        <p:nvPicPr>
+          <p:cNvPr id="5" name="Picture 4">
+            <a:extLst>
+              <a:ext uri="{FF2B5EF4-FFF2-40B4-BE49-F238E27FC236}">
+                <a16:creationId xmlns:a16="http://schemas.microsoft.com/office/drawing/2014/main" id="{13958F68-DECA-8236-B363-DB8B4EFFB5EB}"/>
+              </a:ext>
+            </a:extLst>
+          </p:cNvPr>
+          <p:cNvPicPr>
+            <a:picLocks noChangeAspect="1"/>
+          </p:cNvPicPr>
+          <p:nvPr/>
+        </p:nvPicPr>
+        <p:blipFill>
+          <a:blip r:embed="rId2"/>
+          <a:stretch>
+            <a:fillRect/>
+          </a:stretch>
+        </p:blipFill>
+        <p:spPr>
+          <a:xfrm>
+            <a:off x="604684" y="1376944"/>
+            <a:ext cx="3627088" cy="1239638"/>
+          </a:xfrm>
+          <a:prstGeom prst="rect">
+            <a:avLst/>
+          </a:prstGeom>
+        </p:spPr>
+      </p:pic>
+      <p:pic>
+        <p:nvPicPr>
+          <p:cNvPr id="7" name="Picture 6">
+            <a:extLst>
+              <a:ext uri="{FF2B5EF4-FFF2-40B4-BE49-F238E27FC236}">
+                <a16:creationId xmlns:a16="http://schemas.microsoft.com/office/drawing/2014/main" id="{C1F5807B-870E-19E7-3822-D8FF49370939}"/>
+              </a:ext>
+            </a:extLst>
+          </p:cNvPr>
+          <p:cNvPicPr>
+            <a:picLocks noChangeAspect="1"/>
+          </p:cNvPicPr>
+          <p:nvPr/>
+        </p:nvPicPr>
+        <p:blipFill>
+          <a:blip r:embed="rId3"/>
+          <a:stretch>
+            <a:fillRect/>
+          </a:stretch>
+        </p:blipFill>
+        <p:spPr>
+          <a:xfrm>
+            <a:off x="649872" y="2890864"/>
+            <a:ext cx="3581900" cy="1810003"/>
+          </a:xfrm>
+          <a:prstGeom prst="rect">
+            <a:avLst/>
+          </a:prstGeom>
+        </p:spPr>
+      </p:pic>
+      <p:pic>
+        <p:nvPicPr>
+          <p:cNvPr id="9" name="Picture 8">
+            <a:extLst>
+              <a:ext uri="{FF2B5EF4-FFF2-40B4-BE49-F238E27FC236}">
+                <a16:creationId xmlns:a16="http://schemas.microsoft.com/office/drawing/2014/main" id="{FA7A7A47-659F-EF55-9643-BFCF61828E6D}"/>
+              </a:ext>
+            </a:extLst>
+          </p:cNvPr>
+          <p:cNvPicPr>
+            <a:picLocks noChangeAspect="1"/>
+          </p:cNvPicPr>
+          <p:nvPr/>
+        </p:nvPicPr>
+        <p:blipFill>
+          <a:blip r:embed="rId4"/>
+          <a:stretch>
+            <a:fillRect/>
+          </a:stretch>
+        </p:blipFill>
+        <p:spPr>
+          <a:xfrm>
+            <a:off x="4813574" y="2369665"/>
+            <a:ext cx="3410426" cy="885949"/>
+          </a:xfrm>
+          <a:prstGeom prst="rect">
+            <a:avLst/>
+          </a:prstGeom>
+        </p:spPr>
+      </p:pic>
+      <p:sp>
+        <p:nvSpPr>
+          <p:cNvPr id="10" name="TextBox 9">
+            <a:extLst>
+              <a:ext uri="{FF2B5EF4-FFF2-40B4-BE49-F238E27FC236}">
+                <a16:creationId xmlns:a16="http://schemas.microsoft.com/office/drawing/2014/main" id="{ACA2F560-9181-D063-5957-36F80B381A82}"/>
+              </a:ext>
+            </a:extLst>
+          </p:cNvPr>
+          <p:cNvSpPr txBox="1"/>
+          <p:nvPr/>
+        </p:nvSpPr>
+        <p:spPr>
+          <a:xfrm>
+            <a:off x="4813574" y="1996763"/>
+            <a:ext cx="3345788" cy="307777"/>
+          </a:xfrm>
+          <a:prstGeom prst="rect">
+            <a:avLst/>
+          </a:prstGeom>
+          <a:noFill/>
+        </p:spPr>
+        <p:txBody>
+          <a:bodyPr wrap="none" rtlCol="0">
+            <a:spAutoFit/>
+          </a:bodyPr>
+          <a:lstStyle/>
+          <a:p>
+            <a:r>
+              <a:rPr lang="en-US" dirty="0">
+                <a:solidFill>
+                  <a:schemeClr val="bg1"/>
+                </a:solidFill>
+              </a:rPr>
+              <a:t>Eager Loading (Include() method used):</a:t>
+            </a:r>
+          </a:p>
+        </p:txBody>
+      </p:sp>
+      <p:sp>
+        <p:nvSpPr>
+          <p:cNvPr id="12" name="TextBox 11">
+            <a:extLst>
+              <a:ext uri="{FF2B5EF4-FFF2-40B4-BE49-F238E27FC236}">
+                <a16:creationId xmlns:a16="http://schemas.microsoft.com/office/drawing/2014/main" id="{40B58490-7B52-DB76-42C3-726AD6FF1D27}"/>
+              </a:ext>
+            </a:extLst>
+          </p:cNvPr>
+          <p:cNvSpPr txBox="1"/>
+          <p:nvPr/>
+        </p:nvSpPr>
+        <p:spPr>
+          <a:xfrm>
+            <a:off x="1385188" y="997125"/>
+            <a:ext cx="6856771" cy="307777"/>
+          </a:xfrm>
+          <a:prstGeom prst="rect">
+            <a:avLst/>
+          </a:prstGeom>
+          <a:noFill/>
+        </p:spPr>
+        <p:txBody>
+          <a:bodyPr wrap="square">
+            <a:spAutoFit/>
+          </a:bodyPr>
+          <a:lstStyle/>
+          <a:p>
+            <a:r>
+              <a:rPr lang="en-US" dirty="0">
+                <a:solidFill>
+                  <a:schemeClr val="bg1"/>
+                </a:solidFill>
+              </a:rPr>
+              <a:t>Eager Loading gets record data for related records as part of the original query.</a:t>
+            </a:r>
+          </a:p>
+        </p:txBody>
+      </p:sp>
+    </p:spTree>
+    <p:extLst>
+      <p:ext uri="{BB962C8B-B14F-4D97-AF65-F5344CB8AC3E}">
+        <p14:creationId xmlns:p14="http://schemas.microsoft.com/office/powerpoint/2010/main" val="3420001160"/>
+      </p:ext>
+    </p:extLst>
+  </p:cSld>
+  <p:clrMapOvr>
+    <a:masterClrMapping/>
+  </p:clrMapOvr>
+</p:sld>
+</file>
+
+<file path=ppt/slides/slide29.xml><?xml version="1.0" encoding="utf-8"?>
+<p:sld xmlns:a="http://schemas.openxmlformats.org/drawingml/2006/main" xmlns:r="http://schemas.openxmlformats.org/officeDocument/2006/relationships" xmlns:p="http://schemas.openxmlformats.org/presentationml/2006/main">
+  <p:cSld>
+    <p:spTree>
+      <p:nvGrpSpPr>
+        <p:cNvPr id="1" name="">
+          <a:extLst>
+            <a:ext uri="{FF2B5EF4-FFF2-40B4-BE49-F238E27FC236}">
+              <a16:creationId xmlns:a16="http://schemas.microsoft.com/office/drawing/2014/main" id="{FCF07BDC-0497-11A6-B685-18E3661F1B47}"/>
+            </a:ext>
+          </a:extLst>
+        </p:cNvPr>
+        <p:cNvGrpSpPr/>
+        <p:nvPr/>
+      </p:nvGrpSpPr>
+      <p:grpSpPr>
+        <a:xfrm>
+          <a:off x="0" y="0"/>
+          <a:ext cx="0" cy="0"/>
+          <a:chOff x="0" y="0"/>
+          <a:chExt cx="0" cy="0"/>
+        </a:xfrm>
+      </p:grpSpPr>
+      <p:sp>
+        <p:nvSpPr>
+          <p:cNvPr id="3" name="Title 2">
+            <a:extLst>
+              <a:ext uri="{FF2B5EF4-FFF2-40B4-BE49-F238E27FC236}">
+                <a16:creationId xmlns:a16="http://schemas.microsoft.com/office/drawing/2014/main" id="{BFDF0557-FC5F-47FB-06BC-DA11E55E56F1}"/>
+              </a:ext>
+            </a:extLst>
+          </p:cNvPr>
+          <p:cNvSpPr>
+            <a:spLocks noGrp="1"/>
+          </p:cNvSpPr>
+          <p:nvPr>
+            <p:ph type="title"/>
+          </p:nvPr>
+        </p:nvSpPr>
+        <p:spPr/>
+        <p:txBody>
+          <a:bodyPr/>
+          <a:lstStyle/>
+          <a:p>
+            <a:r>
+              <a:rPr lang="en-US" dirty="0"/>
+              <a:t>Eager vs Lazy Loading</a:t>
+            </a:r>
+          </a:p>
+        </p:txBody>
+      </p:sp>
+      <p:pic>
+        <p:nvPicPr>
+          <p:cNvPr id="5" name="Picture 4">
+            <a:extLst>
+              <a:ext uri="{FF2B5EF4-FFF2-40B4-BE49-F238E27FC236}">
+                <a16:creationId xmlns:a16="http://schemas.microsoft.com/office/drawing/2014/main" id="{370DE1B8-3BBA-233E-2323-7A6A1E79A22F}"/>
+              </a:ext>
+            </a:extLst>
+          </p:cNvPr>
+          <p:cNvPicPr>
+            <a:picLocks noChangeAspect="1"/>
+          </p:cNvPicPr>
+          <p:nvPr/>
+        </p:nvPicPr>
+        <p:blipFill>
+          <a:blip r:embed="rId2"/>
+          <a:stretch>
+            <a:fillRect/>
+          </a:stretch>
+        </p:blipFill>
+        <p:spPr>
+          <a:xfrm>
+            <a:off x="604684" y="1376944"/>
+            <a:ext cx="3627088" cy="1239638"/>
+          </a:xfrm>
+          <a:prstGeom prst="rect">
+            <a:avLst/>
+          </a:prstGeom>
+        </p:spPr>
+      </p:pic>
+      <p:pic>
+        <p:nvPicPr>
+          <p:cNvPr id="7" name="Picture 6">
+            <a:extLst>
+              <a:ext uri="{FF2B5EF4-FFF2-40B4-BE49-F238E27FC236}">
+                <a16:creationId xmlns:a16="http://schemas.microsoft.com/office/drawing/2014/main" id="{16E87E70-85AC-CEC1-498F-E71BE7F3AC53}"/>
+              </a:ext>
+            </a:extLst>
+          </p:cNvPr>
+          <p:cNvPicPr>
+            <a:picLocks noChangeAspect="1"/>
+          </p:cNvPicPr>
+          <p:nvPr/>
+        </p:nvPicPr>
+        <p:blipFill>
+          <a:blip r:embed="rId3"/>
+          <a:stretch>
+            <a:fillRect/>
+          </a:stretch>
+        </p:blipFill>
+        <p:spPr>
+          <a:xfrm>
+            <a:off x="649872" y="2890864"/>
+            <a:ext cx="3581900" cy="1810003"/>
+          </a:xfrm>
+          <a:prstGeom prst="rect">
+            <a:avLst/>
+          </a:prstGeom>
+        </p:spPr>
+      </p:pic>
+      <p:sp>
+        <p:nvSpPr>
+          <p:cNvPr id="10" name="TextBox 9">
+            <a:extLst>
+              <a:ext uri="{FF2B5EF4-FFF2-40B4-BE49-F238E27FC236}">
+                <a16:creationId xmlns:a16="http://schemas.microsoft.com/office/drawing/2014/main" id="{38935EA4-C26A-F5D0-3506-6FAC5DFD3E31}"/>
+              </a:ext>
+            </a:extLst>
+          </p:cNvPr>
+          <p:cNvSpPr txBox="1"/>
+          <p:nvPr/>
+        </p:nvSpPr>
+        <p:spPr>
+          <a:xfrm>
+            <a:off x="4813574" y="1996763"/>
+            <a:ext cx="1784463" cy="307777"/>
+          </a:xfrm>
+          <a:prstGeom prst="rect">
+            <a:avLst/>
+          </a:prstGeom>
+          <a:noFill/>
+        </p:spPr>
+        <p:txBody>
+          <a:bodyPr wrap="none" rtlCol="0">
+            <a:spAutoFit/>
+          </a:bodyPr>
+          <a:lstStyle/>
+          <a:p>
+            <a:r>
+              <a:rPr lang="en-US" dirty="0">
+                <a:solidFill>
+                  <a:schemeClr val="bg1"/>
+                </a:solidFill>
+              </a:rPr>
+              <a:t>Lazy Loading (rare):</a:t>
+            </a:r>
+          </a:p>
+        </p:txBody>
+      </p:sp>
+      <p:sp>
+        <p:nvSpPr>
+          <p:cNvPr id="12" name="TextBox 11">
+            <a:extLst>
+              <a:ext uri="{FF2B5EF4-FFF2-40B4-BE49-F238E27FC236}">
+                <a16:creationId xmlns:a16="http://schemas.microsoft.com/office/drawing/2014/main" id="{59A94C73-C711-C96B-81C1-84A6D76D2ABC}"/>
+              </a:ext>
+            </a:extLst>
+          </p:cNvPr>
+          <p:cNvSpPr txBox="1"/>
+          <p:nvPr/>
+        </p:nvSpPr>
+        <p:spPr>
+          <a:xfrm>
+            <a:off x="1171319" y="966044"/>
+            <a:ext cx="6801361" cy="307777"/>
+          </a:xfrm>
+          <a:prstGeom prst="rect">
+            <a:avLst/>
+          </a:prstGeom>
+          <a:noFill/>
+        </p:spPr>
+        <p:txBody>
+          <a:bodyPr wrap="square">
+            <a:spAutoFit/>
+          </a:bodyPr>
+          <a:lstStyle/>
+          <a:p>
+            <a:r>
+              <a:rPr lang="en-US" dirty="0">
+                <a:solidFill>
+                  <a:schemeClr val="bg1"/>
+                </a:solidFill>
+              </a:rPr>
+              <a:t>Lazy Loading gets record data for related records only when needed. (more queries)</a:t>
+            </a:r>
+          </a:p>
+        </p:txBody>
+      </p:sp>
+      <p:pic>
+        <p:nvPicPr>
+          <p:cNvPr id="4" name="Picture 3">
+            <a:extLst>
+              <a:ext uri="{FF2B5EF4-FFF2-40B4-BE49-F238E27FC236}">
+                <a16:creationId xmlns:a16="http://schemas.microsoft.com/office/drawing/2014/main" id="{28CCC25B-B34A-D91C-5F2D-B5634E3C61EA}"/>
+              </a:ext>
+            </a:extLst>
+          </p:cNvPr>
+          <p:cNvPicPr>
+            <a:picLocks noChangeAspect="1"/>
+          </p:cNvPicPr>
+          <p:nvPr/>
+        </p:nvPicPr>
+        <p:blipFill>
+          <a:blip r:embed="rId4"/>
+          <a:stretch>
+            <a:fillRect/>
+          </a:stretch>
+        </p:blipFill>
+        <p:spPr>
+          <a:xfrm>
+            <a:off x="4912230" y="2341128"/>
+            <a:ext cx="2947765" cy="169584"/>
+          </a:xfrm>
+          <a:prstGeom prst="rect">
+            <a:avLst/>
+          </a:prstGeom>
+        </p:spPr>
+      </p:pic>
+      <p:pic>
+        <p:nvPicPr>
+          <p:cNvPr id="8" name="Picture 7">
+            <a:extLst>
+              <a:ext uri="{FF2B5EF4-FFF2-40B4-BE49-F238E27FC236}">
+                <a16:creationId xmlns:a16="http://schemas.microsoft.com/office/drawing/2014/main" id="{BBDC3738-F43B-896F-EC52-C1591135B127}"/>
+              </a:ext>
+            </a:extLst>
+          </p:cNvPr>
+          <p:cNvPicPr>
+            <a:picLocks noChangeAspect="1"/>
+          </p:cNvPicPr>
+          <p:nvPr/>
+        </p:nvPicPr>
+        <p:blipFill>
+          <a:blip r:embed="rId5"/>
+          <a:stretch>
+            <a:fillRect/>
+          </a:stretch>
+        </p:blipFill>
+        <p:spPr>
+          <a:xfrm>
+            <a:off x="5065693" y="2616582"/>
+            <a:ext cx="2640837" cy="508484"/>
+          </a:xfrm>
+          <a:prstGeom prst="rect">
+            <a:avLst/>
+          </a:prstGeom>
+        </p:spPr>
+      </p:pic>
+      <p:pic>
+        <p:nvPicPr>
+          <p:cNvPr id="13" name="Picture 12">
+            <a:extLst>
+              <a:ext uri="{FF2B5EF4-FFF2-40B4-BE49-F238E27FC236}">
+                <a16:creationId xmlns:a16="http://schemas.microsoft.com/office/drawing/2014/main" id="{C8E46BE7-B359-BBAB-4949-B810837EE2A0}"/>
+              </a:ext>
+            </a:extLst>
+          </p:cNvPr>
+          <p:cNvPicPr>
+            <a:picLocks noChangeAspect="1"/>
+          </p:cNvPicPr>
+          <p:nvPr/>
+        </p:nvPicPr>
+        <p:blipFill>
+          <a:blip r:embed="rId6"/>
+          <a:stretch>
+            <a:fillRect/>
+          </a:stretch>
+        </p:blipFill>
+        <p:spPr>
+          <a:xfrm>
+            <a:off x="4627967" y="3340766"/>
+            <a:ext cx="3516288" cy="638726"/>
+          </a:xfrm>
+          <a:prstGeom prst="rect">
+            <a:avLst/>
+          </a:prstGeom>
+        </p:spPr>
+      </p:pic>
+      <p:pic>
+        <p:nvPicPr>
+          <p:cNvPr id="15" name="Picture 14">
+            <a:extLst>
+              <a:ext uri="{FF2B5EF4-FFF2-40B4-BE49-F238E27FC236}">
+                <a16:creationId xmlns:a16="http://schemas.microsoft.com/office/drawing/2014/main" id="{7927FE37-D484-A424-87C2-34C3BC9A2BE0}"/>
+              </a:ext>
+            </a:extLst>
+          </p:cNvPr>
+          <p:cNvPicPr>
+            <a:picLocks noChangeAspect="1"/>
+          </p:cNvPicPr>
+          <p:nvPr/>
+        </p:nvPicPr>
+        <p:blipFill>
+          <a:blip r:embed="rId7"/>
+          <a:stretch>
+            <a:fillRect/>
+          </a:stretch>
+        </p:blipFill>
+        <p:spPr>
+          <a:xfrm>
+            <a:off x="4984954" y="4463444"/>
+            <a:ext cx="2081349" cy="641511"/>
+          </a:xfrm>
+          <a:prstGeom prst="rect">
+            <a:avLst/>
+          </a:prstGeom>
+        </p:spPr>
+      </p:pic>
+      <p:sp>
+        <p:nvSpPr>
+          <p:cNvPr id="16" name="TextBox 15">
+            <a:extLst>
+              <a:ext uri="{FF2B5EF4-FFF2-40B4-BE49-F238E27FC236}">
+                <a16:creationId xmlns:a16="http://schemas.microsoft.com/office/drawing/2014/main" id="{9CD4ADEC-23E5-3632-3D91-7C915B6F4D6D}"/>
+              </a:ext>
+            </a:extLst>
+          </p:cNvPr>
+          <p:cNvSpPr txBox="1"/>
+          <p:nvPr/>
+        </p:nvSpPr>
+        <p:spPr>
+          <a:xfrm>
+            <a:off x="4912230" y="3979492"/>
+            <a:ext cx="2619628" cy="523220"/>
+          </a:xfrm>
+          <a:prstGeom prst="rect">
+            <a:avLst/>
+          </a:prstGeom>
+          <a:noFill/>
+        </p:spPr>
+        <p:txBody>
+          <a:bodyPr wrap="none" rtlCol="0">
+            <a:spAutoFit/>
+          </a:bodyPr>
+          <a:lstStyle/>
+          <a:p>
+            <a:r>
+              <a:rPr lang="en-US" dirty="0">
+                <a:solidFill>
+                  <a:schemeClr val="bg1"/>
+                </a:solidFill>
+              </a:rPr>
+              <a:t>If 100 orders, then 101 queries</a:t>
+            </a:r>
+          </a:p>
+          <a:p>
+            <a:r>
+              <a:rPr lang="en-US" dirty="0">
+                <a:solidFill>
+                  <a:schemeClr val="bg1"/>
+                </a:solidFill>
+              </a:rPr>
+              <a:t>(1 for orders, 100 for items):</a:t>
+            </a:r>
+          </a:p>
+        </p:txBody>
+      </p:sp>
+    </p:spTree>
+    <p:extLst>
+      <p:ext uri="{BB962C8B-B14F-4D97-AF65-F5344CB8AC3E}">
+        <p14:creationId xmlns:p14="http://schemas.microsoft.com/office/powerpoint/2010/main" val="1149054314"/>
+      </p:ext>
+    </p:extLst>
+  </p:cSld>
+  <p:clrMapOvr>
+    <a:masterClrMapping/>
+  </p:clrMapOvr>
+</p:sld>
+</file>
+
 <file path=ppt/slides/slide3.xml><?xml version="1.0" encoding="utf-8"?>
 <p:sld xmlns:a="http://schemas.openxmlformats.org/drawingml/2006/main" xmlns:r="http://schemas.openxmlformats.org/officeDocument/2006/relationships" xmlns:p="http://schemas.openxmlformats.org/presentationml/2006/main" show="0">
   <p:cSld>

--- a/Resources-Notes-Ppts/ASP-NET-Identity/ASPNET.pptx
+++ b/Resources-Notes-Ppts/ASP-NET-Identity/ASPNET.pptx
@@ -5,7 +5,7 @@
     <p:sldMasterId id="2147483671" r:id="rId1"/>
   </p:sldMasterIdLst>
   <p:notesMasterIdLst>
-    <p:notesMasterId r:id="rId31"/>
+    <p:notesMasterId r:id="rId32"/>
   </p:notesMasterIdLst>
   <p:sldIdLst>
     <p:sldId id="256" r:id="rId2"/>
@@ -37,20 +37,21 @@
     <p:sldId id="284" r:id="rId28"/>
     <p:sldId id="285" r:id="rId29"/>
     <p:sldId id="286" r:id="rId30"/>
+    <p:sldId id="287" r:id="rId31"/>
   </p:sldIdLst>
   <p:sldSz cx="9144000" cy="5143500" type="screen16x9"/>
   <p:notesSz cx="6858000" cy="9144000"/>
   <p:embeddedFontLst>
     <p:embeddedFont>
       <p:font typeface="Hammersmith One" panose="02010703030501060504" pitchFamily="2" charset="0"/>
-      <p:regular r:id="rId32"/>
+      <p:regular r:id="rId33"/>
     </p:embeddedFont>
     <p:embeddedFont>
       <p:font typeface="Source Sans Pro" panose="020B0503030403020204" pitchFamily="34" charset="0"/>
-      <p:regular r:id="rId33"/>
-      <p:bold r:id="rId34"/>
-      <p:italic r:id="rId35"/>
-      <p:boldItalic r:id="rId36"/>
+      <p:regular r:id="rId34"/>
+      <p:bold r:id="rId35"/>
+      <p:italic r:id="rId36"/>
+      <p:boldItalic r:id="rId37"/>
     </p:embeddedFont>
   </p:embeddedFontLst>
   <p:defaultTextStyle>
@@ -35322,7 +35323,7 @@
         </p:nvSpPr>
         <p:spPr>
           <a:xfrm>
-            <a:off x="4813574" y="1996763"/>
+            <a:off x="4803742" y="1549395"/>
             <a:ext cx="1784463" cy="307777"/>
           </a:xfrm>
           <a:prstGeom prst="rect">
@@ -35408,7 +35409,7 @@
         </p:blipFill>
         <p:spPr>
           <a:xfrm>
-            <a:off x="4912230" y="2341128"/>
+            <a:off x="4902398" y="1893760"/>
             <a:ext cx="2947765" cy="169584"/>
           </a:xfrm>
           <a:prstGeom prst="rect">
@@ -35438,7 +35439,7 @@
         </p:blipFill>
         <p:spPr>
           <a:xfrm>
-            <a:off x="5065693" y="2616582"/>
+            <a:off x="5055861" y="2169214"/>
             <a:ext cx="2640837" cy="508484"/>
           </a:xfrm>
           <a:prstGeom prst="rect">
@@ -35468,7 +35469,7 @@
         </p:blipFill>
         <p:spPr>
           <a:xfrm>
-            <a:off x="4627967" y="3340766"/>
+            <a:off x="4618135" y="2893398"/>
             <a:ext cx="3516288" cy="638726"/>
           </a:xfrm>
           <a:prstGeom prst="rect">
@@ -35498,7 +35499,7 @@
         </p:blipFill>
         <p:spPr>
           <a:xfrm>
-            <a:off x="4984954" y="4463444"/>
+            <a:off x="4975122" y="4016076"/>
             <a:ext cx="2081349" cy="641511"/>
           </a:xfrm>
           <a:prstGeom prst="rect">
@@ -35520,7 +35521,7 @@
         </p:nvSpPr>
         <p:spPr>
           <a:xfrm>
-            <a:off x="4912230" y="3979492"/>
+            <a:off x="4902398" y="3532124"/>
             <a:ext cx="2619628" cy="523220"/>
           </a:xfrm>
           <a:prstGeom prst="rect">
@@ -43945,6 +43946,157 @@
         </p:txBody>
       </p:sp>
     </p:spTree>
+  </p:cSld>
+  <p:clrMapOvr>
+    <a:masterClrMapping/>
+  </p:clrMapOvr>
+</p:sld>
+</file>
+
+<file path=ppt/slides/slide30.xml><?xml version="1.0" encoding="utf-8"?>
+<p:sld xmlns:a="http://schemas.openxmlformats.org/drawingml/2006/main" xmlns:r="http://schemas.openxmlformats.org/officeDocument/2006/relationships" xmlns:p="http://schemas.openxmlformats.org/presentationml/2006/main">
+  <p:cSld>
+    <p:spTree>
+      <p:nvGrpSpPr>
+        <p:cNvPr id="1" name=""/>
+        <p:cNvGrpSpPr/>
+        <p:nvPr/>
+      </p:nvGrpSpPr>
+      <p:grpSpPr>
+        <a:xfrm>
+          <a:off x="0" y="0"/>
+          <a:ext cx="0" cy="0"/>
+          <a:chOff x="0" y="0"/>
+          <a:chExt cx="0" cy="0"/>
+        </a:xfrm>
+      </p:grpSpPr>
+      <p:sp>
+        <p:nvSpPr>
+          <p:cNvPr id="2" name="Text Placeholder 1">
+            <a:extLst>
+              <a:ext uri="{FF2B5EF4-FFF2-40B4-BE49-F238E27FC236}">
+                <a16:creationId xmlns:a16="http://schemas.microsoft.com/office/drawing/2014/main" id="{9D0CCB1F-BB8B-74F4-8237-5AFB01E94F2C}"/>
+              </a:ext>
+            </a:extLst>
+          </p:cNvPr>
+          <p:cNvSpPr>
+            <a:spLocks noGrp="1"/>
+          </p:cNvSpPr>
+          <p:nvPr>
+            <p:ph type="body" idx="1"/>
+          </p:nvPr>
+        </p:nvSpPr>
+        <p:spPr>
+          <a:xfrm>
+            <a:off x="1828563" y="1542000"/>
+            <a:ext cx="5486874" cy="394955"/>
+          </a:xfrm>
+        </p:spPr>
+        <p:txBody>
+          <a:bodyPr/>
+          <a:lstStyle/>
+          <a:p>
+            <a:r>
+              <a:rPr lang="en-US" dirty="0"/>
+              <a:t>In general, explicit loading is often preferred to either lazy or eager loading:</a:t>
+            </a:r>
+          </a:p>
+        </p:txBody>
+      </p:sp>
+      <p:sp>
+        <p:nvSpPr>
+          <p:cNvPr id="3" name="Title 2">
+            <a:extLst>
+              <a:ext uri="{FF2B5EF4-FFF2-40B4-BE49-F238E27FC236}">
+                <a16:creationId xmlns:a16="http://schemas.microsoft.com/office/drawing/2014/main" id="{9ABC168A-7741-A2B6-80D2-27E8171127BE}"/>
+              </a:ext>
+            </a:extLst>
+          </p:cNvPr>
+          <p:cNvSpPr>
+            <a:spLocks noGrp="1"/>
+          </p:cNvSpPr>
+          <p:nvPr>
+            <p:ph type="title"/>
+          </p:nvPr>
+        </p:nvSpPr>
+        <p:spPr/>
+        <p:txBody>
+          <a:bodyPr/>
+          <a:lstStyle/>
+          <a:p>
+            <a:r>
+              <a:rPr lang="en-US" dirty="0"/>
+              <a:t>Eager vs Lazy Loading</a:t>
+            </a:r>
+          </a:p>
+        </p:txBody>
+      </p:sp>
+      <p:pic>
+        <p:nvPicPr>
+          <p:cNvPr id="5" name="Picture 4">
+            <a:extLst>
+              <a:ext uri="{FF2B5EF4-FFF2-40B4-BE49-F238E27FC236}">
+                <a16:creationId xmlns:a16="http://schemas.microsoft.com/office/drawing/2014/main" id="{18F1BB0D-B70B-C890-5870-47FF373EC916}"/>
+              </a:ext>
+            </a:extLst>
+          </p:cNvPr>
+          <p:cNvPicPr>
+            <a:picLocks noChangeAspect="1"/>
+          </p:cNvPicPr>
+          <p:nvPr/>
+        </p:nvPicPr>
+        <p:blipFill>
+          <a:blip r:embed="rId2"/>
+          <a:stretch>
+            <a:fillRect/>
+          </a:stretch>
+        </p:blipFill>
+        <p:spPr>
+          <a:xfrm>
+            <a:off x="1192616" y="2395880"/>
+            <a:ext cx="3149333" cy="1524304"/>
+          </a:xfrm>
+          <a:prstGeom prst="rect">
+            <a:avLst/>
+          </a:prstGeom>
+        </p:spPr>
+      </p:pic>
+      <p:pic>
+        <p:nvPicPr>
+          <p:cNvPr id="7" name="Picture 6">
+            <a:extLst>
+              <a:ext uri="{FF2B5EF4-FFF2-40B4-BE49-F238E27FC236}">
+                <a16:creationId xmlns:a16="http://schemas.microsoft.com/office/drawing/2014/main" id="{AEA096D2-4328-BF08-709E-77294D923566}"/>
+              </a:ext>
+            </a:extLst>
+          </p:cNvPr>
+          <p:cNvPicPr>
+            <a:picLocks noChangeAspect="1"/>
+          </p:cNvPicPr>
+          <p:nvPr/>
+        </p:nvPicPr>
+        <p:blipFill>
+          <a:blip r:embed="rId3"/>
+          <a:stretch>
+            <a:fillRect/>
+          </a:stretch>
+        </p:blipFill>
+        <p:spPr>
+          <a:xfrm>
+            <a:off x="5288851" y="2281083"/>
+            <a:ext cx="2175253" cy="1753897"/>
+          </a:xfrm>
+          <a:prstGeom prst="rect">
+            <a:avLst/>
+          </a:prstGeom>
+        </p:spPr>
+      </p:pic>
+    </p:spTree>
+    <p:extLst>
+      <p:ext uri="{BB962C8B-B14F-4D97-AF65-F5344CB8AC3E}">
+        <p14:creationId xmlns:p14="http://schemas.microsoft.com/office/powerpoint/2010/main" val="2456975698"/>
+      </p:ext>
+    </p:extLst>
   </p:cSld>
   <p:clrMapOvr>
     <a:masterClrMapping/>

--- a/Resources-Notes-Ppts/ASP-NET-Identity/ASPNET.pptx
+++ b/Resources-Notes-Ppts/ASP-NET-Identity/ASPNET.pptx
@@ -5,7 +5,7 @@
     <p:sldMasterId id="2147483671" r:id="rId1"/>
   </p:sldMasterIdLst>
   <p:notesMasterIdLst>
-    <p:notesMasterId r:id="rId32"/>
+    <p:notesMasterId r:id="rId33"/>
   </p:notesMasterIdLst>
   <p:sldIdLst>
     <p:sldId id="256" r:id="rId2"/>
@@ -37,21 +37,22 @@
     <p:sldId id="284" r:id="rId28"/>
     <p:sldId id="285" r:id="rId29"/>
     <p:sldId id="286" r:id="rId30"/>
-    <p:sldId id="287" r:id="rId31"/>
+    <p:sldId id="288" r:id="rId31"/>
+    <p:sldId id="287" r:id="rId32"/>
   </p:sldIdLst>
   <p:sldSz cx="9144000" cy="5143500" type="screen16x9"/>
   <p:notesSz cx="6858000" cy="9144000"/>
   <p:embeddedFontLst>
     <p:embeddedFont>
       <p:font typeface="Hammersmith One" panose="02010703030501060504" pitchFamily="2" charset="0"/>
-      <p:regular r:id="rId33"/>
+      <p:regular r:id="rId34"/>
     </p:embeddedFont>
     <p:embeddedFont>
       <p:font typeface="Source Sans Pro" panose="020B0503030403020204" pitchFamily="34" charset="0"/>
-      <p:regular r:id="rId34"/>
-      <p:bold r:id="rId35"/>
-      <p:italic r:id="rId36"/>
-      <p:boldItalic r:id="rId37"/>
+      <p:regular r:id="rId35"/>
+      <p:bold r:id="rId36"/>
+      <p:italic r:id="rId37"/>
+      <p:boldItalic r:id="rId38"/>
     </p:embeddedFont>
   </p:embeddedFontLst>
   <p:defaultTextStyle>
@@ -43975,6 +43976,319 @@
           <p:cNvPr id="2" name="Text Placeholder 1">
             <a:extLst>
               <a:ext uri="{FF2B5EF4-FFF2-40B4-BE49-F238E27FC236}">
+                <a16:creationId xmlns:a16="http://schemas.microsoft.com/office/drawing/2014/main" id="{5413BC2B-7A5D-D363-FF64-C3777F7569DB}"/>
+              </a:ext>
+            </a:extLst>
+          </p:cNvPr>
+          <p:cNvSpPr>
+            <a:spLocks noGrp="1"/>
+          </p:cNvSpPr>
+          <p:nvPr>
+            <p:ph type="body" idx="1"/>
+          </p:nvPr>
+        </p:nvSpPr>
+        <p:spPr>
+          <a:xfrm>
+            <a:off x="1457395" y="1308015"/>
+            <a:ext cx="6229209" cy="419535"/>
+          </a:xfrm>
+        </p:spPr>
+        <p:txBody>
+          <a:bodyPr/>
+          <a:lstStyle/>
+          <a:p>
+            <a:r>
+              <a:rPr lang="en-US" dirty="0"/>
+              <a:t>Explicit loading uses EF core APIs like Entry(), Collection(), or Reference()</a:t>
+            </a:r>
+          </a:p>
+          <a:p>
+            <a:r>
+              <a:rPr lang="en-US" dirty="0"/>
+              <a:t>Rarely used – runs into same problem as lazy loading; many queries </a:t>
+            </a:r>
+          </a:p>
+          <a:p>
+            <a:r>
+              <a:rPr lang="en-US" dirty="0"/>
+              <a:t>Collection() will traverse relationship on to a set (many side of relationship)</a:t>
+            </a:r>
+          </a:p>
+          <a:p>
+            <a:r>
+              <a:rPr lang="en-US" dirty="0"/>
+              <a:t>Reference() will traverse relationship to a single entity (1 side of relationships)</a:t>
+            </a:r>
+          </a:p>
+          <a:p>
+            <a:endParaRPr lang="en-US" dirty="0"/>
+          </a:p>
+          <a:p>
+            <a:endParaRPr lang="en-US" dirty="0"/>
+          </a:p>
+        </p:txBody>
+      </p:sp>
+      <p:sp>
+        <p:nvSpPr>
+          <p:cNvPr id="3" name="Title 2">
+            <a:extLst>
+              <a:ext uri="{FF2B5EF4-FFF2-40B4-BE49-F238E27FC236}">
+                <a16:creationId xmlns:a16="http://schemas.microsoft.com/office/drawing/2014/main" id="{644C61DC-85F0-D519-2321-9D177AB57783}"/>
+              </a:ext>
+            </a:extLst>
+          </p:cNvPr>
+          <p:cNvSpPr>
+            <a:spLocks noGrp="1"/>
+          </p:cNvSpPr>
+          <p:nvPr>
+            <p:ph type="title"/>
+          </p:nvPr>
+        </p:nvSpPr>
+        <p:spPr/>
+        <p:txBody>
+          <a:bodyPr/>
+          <a:lstStyle/>
+          <a:p>
+            <a:r>
+              <a:rPr lang="en-US" dirty="0"/>
+              <a:t>Explicit Loading</a:t>
+            </a:r>
+          </a:p>
+        </p:txBody>
+      </p:sp>
+      <p:pic>
+        <p:nvPicPr>
+          <p:cNvPr id="5" name="Picture 4">
+            <a:extLst>
+              <a:ext uri="{FF2B5EF4-FFF2-40B4-BE49-F238E27FC236}">
+                <a16:creationId xmlns:a16="http://schemas.microsoft.com/office/drawing/2014/main" id="{B3ED925F-12AA-6162-B4B1-462B5347B109}"/>
+              </a:ext>
+            </a:extLst>
+          </p:cNvPr>
+          <p:cNvPicPr>
+            <a:picLocks noChangeAspect="1"/>
+          </p:cNvPicPr>
+          <p:nvPr/>
+        </p:nvPicPr>
+        <p:blipFill>
+          <a:blip r:embed="rId2"/>
+          <a:stretch>
+            <a:fillRect/>
+          </a:stretch>
+        </p:blipFill>
+        <p:spPr>
+          <a:xfrm>
+            <a:off x="1326882" y="2681472"/>
+            <a:ext cx="2296306" cy="807821"/>
+          </a:xfrm>
+          <a:prstGeom prst="rect">
+            <a:avLst/>
+          </a:prstGeom>
+        </p:spPr>
+      </p:pic>
+      <p:pic>
+        <p:nvPicPr>
+          <p:cNvPr id="7" name="Picture 6">
+            <a:extLst>
+              <a:ext uri="{FF2B5EF4-FFF2-40B4-BE49-F238E27FC236}">
+                <a16:creationId xmlns:a16="http://schemas.microsoft.com/office/drawing/2014/main" id="{F750B79B-F8C6-3E06-3C6D-1C38E85F6742}"/>
+              </a:ext>
+            </a:extLst>
+          </p:cNvPr>
+          <p:cNvPicPr>
+            <a:picLocks noChangeAspect="1"/>
+          </p:cNvPicPr>
+          <p:nvPr/>
+        </p:nvPicPr>
+        <p:blipFill>
+          <a:blip r:embed="rId3"/>
+          <a:stretch>
+            <a:fillRect/>
+          </a:stretch>
+        </p:blipFill>
+        <p:spPr>
+          <a:xfrm>
+            <a:off x="4736448" y="2669693"/>
+            <a:ext cx="2539556" cy="758077"/>
+          </a:xfrm>
+          <a:prstGeom prst="rect">
+            <a:avLst/>
+          </a:prstGeom>
+        </p:spPr>
+      </p:pic>
+      <p:pic>
+        <p:nvPicPr>
+          <p:cNvPr id="9" name="Picture 8">
+            <a:extLst>
+              <a:ext uri="{FF2B5EF4-FFF2-40B4-BE49-F238E27FC236}">
+                <a16:creationId xmlns:a16="http://schemas.microsoft.com/office/drawing/2014/main" id="{9B025BCE-2FBE-2290-B7E4-906FBE1EBF6E}"/>
+              </a:ext>
+            </a:extLst>
+          </p:cNvPr>
+          <p:cNvPicPr>
+            <a:picLocks noChangeAspect="1"/>
+          </p:cNvPicPr>
+          <p:nvPr/>
+        </p:nvPicPr>
+        <p:blipFill>
+          <a:blip r:embed="rId4"/>
+          <a:stretch>
+            <a:fillRect/>
+          </a:stretch>
+        </p:blipFill>
+        <p:spPr>
+          <a:xfrm>
+            <a:off x="1509388" y="4148818"/>
+            <a:ext cx="1887658" cy="782866"/>
+          </a:xfrm>
+          <a:prstGeom prst="rect">
+            <a:avLst/>
+          </a:prstGeom>
+        </p:spPr>
+      </p:pic>
+      <p:sp>
+        <p:nvSpPr>
+          <p:cNvPr id="10" name="TextBox 9">
+            <a:extLst>
+              <a:ext uri="{FF2B5EF4-FFF2-40B4-BE49-F238E27FC236}">
+                <a16:creationId xmlns:a16="http://schemas.microsoft.com/office/drawing/2014/main" id="{3D913945-7749-0AA8-B643-7AF62BEAED18}"/>
+              </a:ext>
+            </a:extLst>
+          </p:cNvPr>
+          <p:cNvSpPr txBox="1"/>
+          <p:nvPr/>
+        </p:nvSpPr>
+        <p:spPr>
+          <a:xfrm>
+            <a:off x="1641313" y="3711678"/>
+            <a:ext cx="1667444" cy="307777"/>
+          </a:xfrm>
+          <a:prstGeom prst="rect">
+            <a:avLst/>
+          </a:prstGeom>
+          <a:noFill/>
+        </p:spPr>
+        <p:txBody>
+          <a:bodyPr wrap="none" rtlCol="0">
+            <a:spAutoFit/>
+          </a:bodyPr>
+          <a:lstStyle/>
+          <a:p>
+            <a:r>
+              <a:rPr lang="en-US" dirty="0">
+                <a:solidFill>
+                  <a:schemeClr val="bg1"/>
+                </a:solidFill>
+              </a:rPr>
+              <a:t>Roughly becomes:</a:t>
+            </a:r>
+          </a:p>
+        </p:txBody>
+      </p:sp>
+      <p:pic>
+        <p:nvPicPr>
+          <p:cNvPr id="12" name="Picture 11">
+            <a:extLst>
+              <a:ext uri="{FF2B5EF4-FFF2-40B4-BE49-F238E27FC236}">
+                <a16:creationId xmlns:a16="http://schemas.microsoft.com/office/drawing/2014/main" id="{2F5B7FC7-B33E-A86B-7C3C-5123B5C96684}"/>
+              </a:ext>
+            </a:extLst>
+          </p:cNvPr>
+          <p:cNvPicPr>
+            <a:picLocks noChangeAspect="1"/>
+          </p:cNvPicPr>
+          <p:nvPr/>
+        </p:nvPicPr>
+        <p:blipFill>
+          <a:blip r:embed="rId5"/>
+          <a:stretch>
+            <a:fillRect/>
+          </a:stretch>
+        </p:blipFill>
+        <p:spPr>
+          <a:xfrm>
+            <a:off x="5062397" y="4132423"/>
+            <a:ext cx="1887658" cy="815655"/>
+          </a:xfrm>
+          <a:prstGeom prst="rect">
+            <a:avLst/>
+          </a:prstGeom>
+        </p:spPr>
+      </p:pic>
+      <p:sp>
+        <p:nvSpPr>
+          <p:cNvPr id="13" name="TextBox 12">
+            <a:extLst>
+              <a:ext uri="{FF2B5EF4-FFF2-40B4-BE49-F238E27FC236}">
+                <a16:creationId xmlns:a16="http://schemas.microsoft.com/office/drawing/2014/main" id="{D619CCB1-2CB9-F7A8-7258-149ACAF06EB4}"/>
+              </a:ext>
+            </a:extLst>
+          </p:cNvPr>
+          <p:cNvSpPr txBox="1"/>
+          <p:nvPr/>
+        </p:nvSpPr>
+        <p:spPr>
+          <a:xfrm>
+            <a:off x="4905623" y="3711677"/>
+            <a:ext cx="1667444" cy="307777"/>
+          </a:xfrm>
+          <a:prstGeom prst="rect">
+            <a:avLst/>
+          </a:prstGeom>
+          <a:noFill/>
+        </p:spPr>
+        <p:txBody>
+          <a:bodyPr wrap="none" rtlCol="0">
+            <a:spAutoFit/>
+          </a:bodyPr>
+          <a:lstStyle/>
+          <a:p>
+            <a:r>
+              <a:rPr lang="en-US" dirty="0">
+                <a:solidFill>
+                  <a:schemeClr val="bg1"/>
+                </a:solidFill>
+              </a:rPr>
+              <a:t>Roughly becomes:</a:t>
+            </a:r>
+          </a:p>
+        </p:txBody>
+      </p:sp>
+    </p:spTree>
+    <p:extLst>
+      <p:ext uri="{BB962C8B-B14F-4D97-AF65-F5344CB8AC3E}">
+        <p14:creationId xmlns:p14="http://schemas.microsoft.com/office/powerpoint/2010/main" val="31935261"/>
+      </p:ext>
+    </p:extLst>
+  </p:cSld>
+  <p:clrMapOvr>
+    <a:masterClrMapping/>
+  </p:clrMapOvr>
+</p:sld>
+</file>
+
+<file path=ppt/slides/slide31.xml><?xml version="1.0" encoding="utf-8"?>
+<p:sld xmlns:a="http://schemas.openxmlformats.org/drawingml/2006/main" xmlns:r="http://schemas.openxmlformats.org/officeDocument/2006/relationships" xmlns:p="http://schemas.openxmlformats.org/presentationml/2006/main">
+  <p:cSld>
+    <p:spTree>
+      <p:nvGrpSpPr>
+        <p:cNvPr id="1" name=""/>
+        <p:cNvGrpSpPr/>
+        <p:nvPr/>
+      </p:nvGrpSpPr>
+      <p:grpSpPr>
+        <a:xfrm>
+          <a:off x="0" y="0"/>
+          <a:ext cx="0" cy="0"/>
+          <a:chOff x="0" y="0"/>
+          <a:chExt cx="0" cy="0"/>
+        </a:xfrm>
+      </p:grpSpPr>
+      <p:sp>
+        <p:nvSpPr>
+          <p:cNvPr id="2" name="Text Placeholder 1">
+            <a:extLst>
+              <a:ext uri="{FF2B5EF4-FFF2-40B4-BE49-F238E27FC236}">
                 <a16:creationId xmlns:a16="http://schemas.microsoft.com/office/drawing/2014/main" id="{9D0CCB1F-BB8B-74F4-8237-5AFB01E94F2C}"/>
               </a:ext>
             </a:extLst>
@@ -43988,8 +44302,8 @@
         </p:nvSpPr>
         <p:spPr>
           <a:xfrm>
-            <a:off x="1828563" y="1542000"/>
-            <a:ext cx="5486874" cy="394955"/>
+            <a:off x="1542527" y="1312574"/>
+            <a:ext cx="6907398" cy="394955"/>
           </a:xfrm>
         </p:spPr>
         <p:txBody>
@@ -43998,7 +44312,7 @@
           <a:p>
             <a:r>
               <a:rPr lang="en-US" dirty="0"/>
-              <a:t>In general, explicit loading is often preferred to either lazy or eager loading:</a:t>
+              <a:t>In general, manual separate queries or projection is often preferred:</a:t>
             </a:r>
           </a:p>
         </p:txBody>
@@ -44026,7 +44340,7 @@
           <a:p>
             <a:r>
               <a:rPr lang="en-US" dirty="0"/>
-              <a:t>Eager vs Lazy Loading</a:t>
+              <a:t>Eager vs Lazy vs Explicit Loading</a:t>
             </a:r>
           </a:p>
         </p:txBody>
@@ -44091,6 +44405,84 @@
           </a:prstGeom>
         </p:spPr>
       </p:pic>
+      <p:sp>
+        <p:nvSpPr>
+          <p:cNvPr id="8" name="TextBox 7">
+            <a:extLst>
+              <a:ext uri="{FF2B5EF4-FFF2-40B4-BE49-F238E27FC236}">
+                <a16:creationId xmlns:a16="http://schemas.microsoft.com/office/drawing/2014/main" id="{A39FACF8-5FF8-CDC6-533F-E7B4DCB4721C}"/>
+              </a:ext>
+            </a:extLst>
+          </p:cNvPr>
+          <p:cNvSpPr txBox="1"/>
+          <p:nvPr/>
+        </p:nvSpPr>
+        <p:spPr>
+          <a:xfrm>
+            <a:off x="1118301" y="2088103"/>
+            <a:ext cx="2202847" cy="307777"/>
+          </a:xfrm>
+          <a:prstGeom prst="rect">
+            <a:avLst/>
+          </a:prstGeom>
+          <a:noFill/>
+        </p:spPr>
+        <p:txBody>
+          <a:bodyPr wrap="none" rtlCol="0">
+            <a:spAutoFit/>
+          </a:bodyPr>
+          <a:lstStyle/>
+          <a:p>
+            <a:r>
+              <a:rPr lang="en-US" dirty="0">
+                <a:solidFill>
+                  <a:schemeClr val="bg1"/>
+                </a:solidFill>
+              </a:rPr>
+              <a:t>Manual separate queries:</a:t>
+            </a:r>
+          </a:p>
+        </p:txBody>
+      </p:sp>
+      <p:sp>
+        <p:nvSpPr>
+          <p:cNvPr id="9" name="TextBox 8">
+            <a:extLst>
+              <a:ext uri="{FF2B5EF4-FFF2-40B4-BE49-F238E27FC236}">
+                <a16:creationId xmlns:a16="http://schemas.microsoft.com/office/drawing/2014/main" id="{431B807E-5793-0BEC-22D5-9BACAF5CE6A9}"/>
+              </a:ext>
+            </a:extLst>
+          </p:cNvPr>
+          <p:cNvSpPr txBox="1"/>
+          <p:nvPr/>
+        </p:nvSpPr>
+        <p:spPr>
+          <a:xfrm>
+            <a:off x="5218353" y="1973306"/>
+            <a:ext cx="1031051" cy="307777"/>
+          </a:xfrm>
+          <a:prstGeom prst="rect">
+            <a:avLst/>
+          </a:prstGeom>
+          <a:noFill/>
+        </p:spPr>
+        <p:txBody>
+          <a:bodyPr wrap="none" rtlCol="0">
+            <a:spAutoFit/>
+          </a:bodyPr>
+          <a:lstStyle/>
+          <a:p>
+            <a:r>
+              <a:rPr lang="en-US" dirty="0">
+                <a:solidFill>
+                  <a:schemeClr val="bg1"/>
+                </a:solidFill>
+              </a:rPr>
+              <a:t>Projection:</a:t>
+            </a:r>
+          </a:p>
+        </p:txBody>
+      </p:sp>
     </p:spTree>
     <p:extLst>
       <p:ext uri="{BB962C8B-B14F-4D97-AF65-F5344CB8AC3E}">

--- a/Resources-Notes-Ppts/ASP-NET-Identity/ASPNET.pptx
+++ b/Resources-Notes-Ppts/ASP-NET-Identity/ASPNET.pptx
@@ -44302,7 +44302,7 @@
         </p:nvSpPr>
         <p:spPr>
           <a:xfrm>
-            <a:off x="1542527" y="1312574"/>
+            <a:off x="1127876" y="1413993"/>
             <a:ext cx="6907398" cy="394955"/>
           </a:xfrm>
         </p:spPr>
@@ -44311,8 +44311,8 @@
           <a:lstStyle/>
           <a:p>
             <a:r>
-              <a:rPr lang="en-US" dirty="0"/>
-              <a:t>In general, manual separate queries or projection is often preferred:</a:t>
+              <a:rPr lang="en-US" sz="1100" dirty="0"/>
+              <a:t>In general, manual separate queries or projection is often preferred (i.e. no eager, lazy, or explicit loading):</a:t>
             </a:r>
           </a:p>
         </p:txBody>
